--- a/apresentacao/slides.pptx
+++ b/apresentacao/slides.pptx
@@ -8344,6 +8344,11 @@
           <a:lstStyle/>
           <a:p>
             <a:r>
+              <a:t>Algoritmos e Estruturas de Dados I — CCF 211</a:t>
+            </a:r>
+          </a:p>
+          <a:p>
+            <a:r>
               <a:t>&lt;Aluno 1&gt; – &lt;matrícula&gt;</a:t>
             </a:r>
           </a:p>
@@ -8514,6 +8519,49 @@
           </a:p>
         </p:txBody>
       </p:sp>
+      <p:sp>
+        <p:nvSpPr>
+          <p:cNvPr id="4" name="TextBox 3"/>
+          <p:cNvSpPr txBox="1"/>
+          <p:nvPr/>
+        </p:nvSpPr>
+        <p:spPr>
+          <a:xfrm>
+            <a:off x="932688" y="5852160"/>
+            <a:ext cx="1097280" cy="219456"/>
+          </a:xfrm>
+          <a:prstGeom prst="rect">
+            <a:avLst/>
+          </a:prstGeom>
+          <a:noFill/>
+        </p:spPr>
+        <p:txBody>
+          <a:bodyPr wrap="square" lIns="0" rIns="0" tIns="0" bIns="0">
+            <a:spAutoFit/>
+          </a:bodyPr>
+          <a:lstStyle/>
+          <a:p>
+            <a:pPr algn="l" marL="0" indent="0">
+              <a:lnSpc>
+                <a:spcPct val="90000"/>
+              </a:lnSpc>
+              <a:spcBef>
+                <a:spcPts val="0"/>
+              </a:spcBef>
+              <a:buNone/>
+            </a:pPr>
+            <a:r>
+              <a:rPr sz="1100" b="0">
+                <a:solidFill>
+                  <a:srgbClr val="6E6C66"/>
+                </a:solidFill>
+                <a:latin typeface="Lato"/>
+              </a:rPr>
+              <a:t>10</a:t>
+            </a:r>
+          </a:p>
+        </p:txBody>
+      </p:sp>
     </p:spTree>
   </p:cSld>
   <p:clrMapOvr>
@@ -8670,6 +8718,49 @@
                 <a:latin typeface="Lato"/>
               </a:rPr>
               <a:t>Conferimos as dez distâncias do exemplo, uma a uma. Todas batem com o enunciado.</a:t>
+            </a:r>
+          </a:p>
+        </p:txBody>
+      </p:sp>
+      <p:sp>
+        <p:nvSpPr>
+          <p:cNvPr id="4" name="TextBox 3"/>
+          <p:cNvSpPr txBox="1"/>
+          <p:nvPr/>
+        </p:nvSpPr>
+        <p:spPr>
+          <a:xfrm>
+            <a:off x="932688" y="5852160"/>
+            <a:ext cx="1097280" cy="219456"/>
+          </a:xfrm>
+          <a:prstGeom prst="rect">
+            <a:avLst/>
+          </a:prstGeom>
+          <a:noFill/>
+        </p:spPr>
+        <p:txBody>
+          <a:bodyPr wrap="square" lIns="0" rIns="0" tIns="0" bIns="0">
+            <a:spAutoFit/>
+          </a:bodyPr>
+          <a:lstStyle/>
+          <a:p>
+            <a:pPr algn="l" marL="0" indent="0">
+              <a:lnSpc>
+                <a:spcPct val="90000"/>
+              </a:lnSpc>
+              <a:spcBef>
+                <a:spcPts val="0"/>
+              </a:spcBef>
+              <a:buNone/>
+            </a:pPr>
+            <a:r>
+              <a:rPr sz="1100" b="0">
+                <a:solidFill>
+                  <a:srgbClr val="6E6C66"/>
+                </a:solidFill>
+                <a:latin typeface="Lato"/>
+              </a:rPr>
+              <a:t>11</a:t>
             </a:r>
           </a:p>
         </p:txBody>
@@ -8809,6 +8900,49 @@
           </a:p>
         </p:txBody>
       </p:sp>
+      <p:sp>
+        <p:nvSpPr>
+          <p:cNvPr id="4" name="TextBox 3"/>
+          <p:cNvSpPr txBox="1"/>
+          <p:nvPr/>
+        </p:nvSpPr>
+        <p:spPr>
+          <a:xfrm>
+            <a:off x="932688" y="5852160"/>
+            <a:ext cx="1097280" cy="219456"/>
+          </a:xfrm>
+          <a:prstGeom prst="rect">
+            <a:avLst/>
+          </a:prstGeom>
+          <a:noFill/>
+        </p:spPr>
+        <p:txBody>
+          <a:bodyPr wrap="square" lIns="0" rIns="0" tIns="0" bIns="0">
+            <a:spAutoFit/>
+          </a:bodyPr>
+          <a:lstStyle/>
+          <a:p>
+            <a:pPr algn="l" marL="0" indent="0">
+              <a:lnSpc>
+                <a:spcPct val="90000"/>
+              </a:lnSpc>
+              <a:spcBef>
+                <a:spcPts val="0"/>
+              </a:spcBef>
+              <a:buNone/>
+            </a:pPr>
+            <a:r>
+              <a:rPr sz="1100" b="0">
+                <a:solidFill>
+                  <a:srgbClr val="6E6C66"/>
+                </a:solidFill>
+                <a:latin typeface="Lato"/>
+              </a:rPr>
+              <a:t>12</a:t>
+            </a:r>
+          </a:p>
+        </p:txBody>
+      </p:sp>
     </p:spTree>
   </p:cSld>
   <p:clrMapOvr>
@@ -8965,6 +9099,49 @@
                 <a:latin typeface="Lato"/>
               </a:rPr>
               <a:t>Restrição do enunciado: toda lista tem que ser encadeada, e cada entidade tem que ser um TAD.</a:t>
+            </a:r>
+          </a:p>
+        </p:txBody>
+      </p:sp>
+      <p:sp>
+        <p:nvSpPr>
+          <p:cNvPr id="4" name="TextBox 3"/>
+          <p:cNvSpPr txBox="1"/>
+          <p:nvPr/>
+        </p:nvSpPr>
+        <p:spPr>
+          <a:xfrm>
+            <a:off x="932688" y="5852160"/>
+            <a:ext cx="1097280" cy="219456"/>
+          </a:xfrm>
+          <a:prstGeom prst="rect">
+            <a:avLst/>
+          </a:prstGeom>
+          <a:noFill/>
+        </p:spPr>
+        <p:txBody>
+          <a:bodyPr wrap="square" lIns="0" rIns="0" tIns="0" bIns="0">
+            <a:spAutoFit/>
+          </a:bodyPr>
+          <a:lstStyle/>
+          <a:p>
+            <a:pPr algn="l" marL="0" indent="0">
+              <a:lnSpc>
+                <a:spcPct val="90000"/>
+              </a:lnSpc>
+              <a:spcBef>
+                <a:spcPts val="0"/>
+              </a:spcBef>
+              <a:buNone/>
+            </a:pPr>
+            <a:r>
+              <a:rPr sz="1100" b="0">
+                <a:solidFill>
+                  <a:srgbClr val="6E6C66"/>
+                </a:solidFill>
+                <a:latin typeface="Lato"/>
+              </a:rPr>
+              <a:t>2</a:t>
             </a:r>
           </a:p>
         </p:txBody>
@@ -9149,6 +9326,49 @@
           </a:p>
         </p:txBody>
       </p:sp>
+      <p:sp>
+        <p:nvSpPr>
+          <p:cNvPr id="4" name="TextBox 3"/>
+          <p:cNvSpPr txBox="1"/>
+          <p:nvPr/>
+        </p:nvSpPr>
+        <p:spPr>
+          <a:xfrm>
+            <a:off x="932688" y="5852160"/>
+            <a:ext cx="1097280" cy="219456"/>
+          </a:xfrm>
+          <a:prstGeom prst="rect">
+            <a:avLst/>
+          </a:prstGeom>
+          <a:noFill/>
+        </p:spPr>
+        <p:txBody>
+          <a:bodyPr wrap="square" lIns="0" rIns="0" tIns="0" bIns="0">
+            <a:spAutoFit/>
+          </a:bodyPr>
+          <a:lstStyle/>
+          <a:p>
+            <a:pPr algn="l" marL="0" indent="0">
+              <a:lnSpc>
+                <a:spcPct val="90000"/>
+              </a:lnSpc>
+              <a:spcBef>
+                <a:spcPts val="0"/>
+              </a:spcBef>
+              <a:buNone/>
+            </a:pPr>
+            <a:r>
+              <a:rPr sz="1100" b="0">
+                <a:solidFill>
+                  <a:srgbClr val="6E6C66"/>
+                </a:solidFill>
+                <a:latin typeface="Lato"/>
+              </a:rPr>
+              <a:t>3</a:t>
+            </a:r>
+          </a:p>
+        </p:txBody>
+      </p:sp>
     </p:spTree>
   </p:cSld>
   <p:clrMapOvr>
@@ -9204,8 +9424,8 @@
         </p:blipFill>
         <p:spPr>
           <a:xfrm>
-            <a:off x="1401249" y="1115568"/>
-            <a:ext cx="3950344" cy="1920240"/>
+            <a:off x="1684503" y="1115568"/>
+            <a:ext cx="3383837" cy="1920240"/>
           </a:xfrm>
           <a:prstGeom prst="rect">
             <a:avLst/>
@@ -9228,8 +9448,8 @@
         </p:blipFill>
         <p:spPr>
           <a:xfrm>
-            <a:off x="7259819" y="1115568"/>
-            <a:ext cx="3105420" cy="1920240"/>
+            <a:off x="7442412" y="1115568"/>
+            <a:ext cx="2740234" cy="1920240"/>
           </a:xfrm>
           <a:prstGeom prst="rect">
             <a:avLst/>
@@ -9404,6 +9624,49 @@
                 <a:latin typeface="Lato"/>
               </a:rPr>
               <a:t>A célula cabeça não guarda Pokémon nenhum. Ela existe para que o primeiro elemento também tenha um antecessor, e assim a remoção não precisa de caso especial. O campo ultimo faz a inserção no fim custar O(1).</a:t>
+            </a:r>
+          </a:p>
+        </p:txBody>
+      </p:sp>
+      <p:sp>
+        <p:nvSpPr>
+          <p:cNvPr id="8" name="TextBox 7"/>
+          <p:cNvSpPr txBox="1"/>
+          <p:nvPr/>
+        </p:nvSpPr>
+        <p:spPr>
+          <a:xfrm>
+            <a:off x="932688" y="5852160"/>
+            <a:ext cx="1097280" cy="219456"/>
+          </a:xfrm>
+          <a:prstGeom prst="rect">
+            <a:avLst/>
+          </a:prstGeom>
+          <a:noFill/>
+        </p:spPr>
+        <p:txBody>
+          <a:bodyPr wrap="square" lIns="0" rIns="0" tIns="0" bIns="0">
+            <a:spAutoFit/>
+          </a:bodyPr>
+          <a:lstStyle/>
+          <a:p>
+            <a:pPr algn="l" marL="0" indent="0">
+              <a:lnSpc>
+                <a:spcPct val="90000"/>
+              </a:lnSpc>
+              <a:spcBef>
+                <a:spcPts val="0"/>
+              </a:spcBef>
+              <a:buNone/>
+            </a:pPr>
+            <a:r>
+              <a:rPr sz="1100" b="0">
+                <a:solidFill>
+                  <a:srgbClr val="6E6C66"/>
+                </a:solidFill>
+                <a:latin typeface="Lato"/>
+              </a:rPr>
+              <a:t>4</a:t>
             </a:r>
           </a:p>
         </p:txBody>
@@ -9463,8 +9726,8 @@
         </p:blipFill>
         <p:spPr>
           <a:xfrm>
-            <a:off x="932688" y="1115568"/>
-            <a:ext cx="6355080" cy="4163876"/>
+            <a:off x="983418" y="1115568"/>
+            <a:ext cx="6253618" cy="4279392"/>
           </a:xfrm>
           <a:prstGeom prst="rect">
             <a:avLst/>
@@ -9479,7 +9742,7 @@
         </p:nvSpPr>
         <p:spPr>
           <a:xfrm>
-            <a:off x="932688" y="5370884"/>
+            <a:off x="932688" y="5486400"/>
             <a:ext cx="6355080" cy="256032"/>
           </a:xfrm>
           <a:prstGeom prst="rect">
@@ -9617,6 +9880,49 @@
                 <a:latin typeface="Lato"/>
               </a:rPr>
               <a:t>Sem essas duas linhas, ultimo apontaria para memória já liberada e a próxima inserção escreveria nela. Às vezes funciona, às vezes o programa quebra — é o bug clássico da lista com apontador para o fim.</a:t>
+            </a:r>
+          </a:p>
+        </p:txBody>
+      </p:sp>
+      <p:sp>
+        <p:nvSpPr>
+          <p:cNvPr id="6" name="TextBox 5"/>
+          <p:cNvSpPr txBox="1"/>
+          <p:nvPr/>
+        </p:nvSpPr>
+        <p:spPr>
+          <a:xfrm>
+            <a:off x="932688" y="5852160"/>
+            <a:ext cx="1097280" cy="219456"/>
+          </a:xfrm>
+          <a:prstGeom prst="rect">
+            <a:avLst/>
+          </a:prstGeom>
+          <a:noFill/>
+        </p:spPr>
+        <p:txBody>
+          <a:bodyPr wrap="square" lIns="0" rIns="0" tIns="0" bIns="0">
+            <a:spAutoFit/>
+          </a:bodyPr>
+          <a:lstStyle/>
+          <a:p>
+            <a:pPr algn="l" marL="0" indent="0">
+              <a:lnSpc>
+                <a:spcPct val="90000"/>
+              </a:lnSpc>
+              <a:spcBef>
+                <a:spcPts val="0"/>
+              </a:spcBef>
+              <a:buNone/>
+            </a:pPr>
+            <a:r>
+              <a:rPr sz="1100" b="0">
+                <a:solidFill>
+                  <a:srgbClr val="6E6C66"/>
+                </a:solidFill>
+                <a:latin typeface="Lato"/>
+              </a:rPr>
+              <a:t>5</a:t>
             </a:r>
           </a:p>
         </p:txBody>
@@ -9676,8 +9982,8 @@
         </p:blipFill>
         <p:spPr>
           <a:xfrm>
-            <a:off x="3409334" y="1115568"/>
-            <a:ext cx="5370282" cy="2148840"/>
+            <a:off x="3701091" y="1115568"/>
+            <a:ext cx="4786769" cy="2148840"/>
           </a:xfrm>
           <a:prstGeom prst="rect">
             <a:avLst/>
@@ -9830,6 +10136,49 @@
                 <a:latin typeface="Lato"/>
               </a:rPr>
               <a:t>A conta é feita em long long, e as coordenadas são limitadas a um milhão. Sem esse limite a soma estoura o long long, a raiz devolve nan e a missão vai para o treinador errado.</a:t>
+            </a:r>
+          </a:p>
+        </p:txBody>
+      </p:sp>
+      <p:sp>
+        <p:nvSpPr>
+          <p:cNvPr id="6" name="TextBox 5"/>
+          <p:cNvSpPr txBox="1"/>
+          <p:nvPr/>
+        </p:nvSpPr>
+        <p:spPr>
+          <a:xfrm>
+            <a:off x="932688" y="5852160"/>
+            <a:ext cx="1097280" cy="219456"/>
+          </a:xfrm>
+          <a:prstGeom prst="rect">
+            <a:avLst/>
+          </a:prstGeom>
+          <a:noFill/>
+        </p:spPr>
+        <p:txBody>
+          <a:bodyPr wrap="square" lIns="0" rIns="0" tIns="0" bIns="0">
+            <a:spAutoFit/>
+          </a:bodyPr>
+          <a:lstStyle/>
+          <a:p>
+            <a:pPr algn="l" marL="0" indent="0">
+              <a:lnSpc>
+                <a:spcPct val="90000"/>
+              </a:lnSpc>
+              <a:spcBef>
+                <a:spcPts val="0"/>
+              </a:spcBef>
+              <a:buNone/>
+            </a:pPr>
+            <a:r>
+              <a:rPr sz="1100" b="0">
+                <a:solidFill>
+                  <a:srgbClr val="6E6C66"/>
+                </a:solidFill>
+                <a:latin typeface="Lato"/>
+              </a:rPr>
+              <a:t>6</a:t>
             </a:r>
           </a:p>
         </p:txBody>
@@ -9889,8 +10238,8 @@
         </p:blipFill>
         <p:spPr>
           <a:xfrm>
-            <a:off x="932688" y="1115568"/>
-            <a:ext cx="6355080" cy="4251150"/>
+            <a:off x="1041003" y="1115568"/>
+            <a:ext cx="6138449" cy="4279392"/>
           </a:xfrm>
           <a:prstGeom prst="rect">
             <a:avLst/>
@@ -9905,7 +10254,7 @@
         </p:nvSpPr>
         <p:spPr>
           <a:xfrm>
-            <a:off x="932688" y="5458158"/>
+            <a:off x="932688" y="5486400"/>
             <a:ext cx="6355080" cy="256032"/>
           </a:xfrm>
           <a:prstGeom prst="rect">
@@ -10043,6 +10392,49 @@
                 <a:latin typeface="Lato"/>
               </a:rPr>
               <a:t>O laço percorre os Ids de 1 até n. A busca no Centro, no começo do corpo, é o que confirma que aquele Pokémon ainda está fugido.</a:t>
+            </a:r>
+          </a:p>
+        </p:txBody>
+      </p:sp>
+      <p:sp>
+        <p:nvSpPr>
+          <p:cNvPr id="6" name="TextBox 5"/>
+          <p:cNvSpPr txBox="1"/>
+          <p:nvPr/>
+        </p:nvSpPr>
+        <p:spPr>
+          <a:xfrm>
+            <a:off x="932688" y="5852160"/>
+            <a:ext cx="1097280" cy="219456"/>
+          </a:xfrm>
+          <a:prstGeom prst="rect">
+            <a:avLst/>
+          </a:prstGeom>
+          <a:noFill/>
+        </p:spPr>
+        <p:txBody>
+          <a:bodyPr wrap="square" lIns="0" rIns="0" tIns="0" bIns="0">
+            <a:spAutoFit/>
+          </a:bodyPr>
+          <a:lstStyle/>
+          <a:p>
+            <a:pPr algn="l" marL="0" indent="0">
+              <a:lnSpc>
+                <a:spcPct val="90000"/>
+              </a:lnSpc>
+              <a:spcBef>
+                <a:spcPts val="0"/>
+              </a:spcBef>
+              <a:buNone/>
+            </a:pPr>
+            <a:r>
+              <a:rPr sz="1100" b="0">
+                <a:solidFill>
+                  <a:srgbClr val="6E6C66"/>
+                </a:solidFill>
+                <a:latin typeface="Lato"/>
+              </a:rPr>
+              <a:t>7</a:t>
             </a:r>
           </a:p>
         </p:txBody>
@@ -10102,8 +10494,8 @@
         </p:blipFill>
         <p:spPr>
           <a:xfrm>
-            <a:off x="1220815" y="1115568"/>
-            <a:ext cx="4265492" cy="3622898"/>
+            <a:off x="1225935" y="1115568"/>
+            <a:ext cx="4255253" cy="3694176"/>
           </a:xfrm>
           <a:prstGeom prst="rect">
             <a:avLst/>
@@ -10126,8 +10518,8 @@
         </p:blipFill>
         <p:spPr>
           <a:xfrm>
-            <a:off x="6414516" y="1115568"/>
-            <a:ext cx="4841748" cy="3622898"/>
+            <a:off x="6424931" y="1115568"/>
+            <a:ext cx="4820917" cy="3694176"/>
           </a:xfrm>
           <a:prstGeom prst="rect">
             <a:avLst/>
@@ -10142,7 +10534,7 @@
         </p:nvSpPr>
         <p:spPr>
           <a:xfrm>
-            <a:off x="932688" y="4848194"/>
+            <a:off x="932688" y="4919472"/>
             <a:ext cx="4841748" cy="256032"/>
           </a:xfrm>
           <a:prstGeom prst="rect">
@@ -10185,7 +10577,7 @@
         </p:nvSpPr>
         <p:spPr>
           <a:xfrm>
-            <a:off x="6414516" y="4848194"/>
+            <a:off x="6414516" y="4919472"/>
             <a:ext cx="4841748" cy="256032"/>
           </a:xfrm>
           <a:prstGeom prst="rect">
@@ -10228,8 +10620,8 @@
         </p:nvSpPr>
         <p:spPr>
           <a:xfrm>
-            <a:off x="932688" y="5195666"/>
-            <a:ext cx="10323576" cy="510189"/>
+            <a:off x="932688" y="5266944"/>
+            <a:ext cx="10323576" cy="438912"/>
           </a:xfrm>
           <a:prstGeom prst="rect">
             <a:avLst/>
@@ -10252,13 +10644,56 @@
               <a:buNone/>
             </a:pPr>
             <a:r>
-              <a:rPr sz="1600" b="0">
+              <a:rPr sz="1500" b="0">
                 <a:solidFill>
                   <a:srgbClr val="222320"/>
                 </a:solidFill>
                 <a:latin typeface="Lato"/>
               </a:rPr>
               <a:t>As duas primeiras linhas trazem os treinadores, com nome e quantidade de Pokébolas. Depois vem a quantidade de Pokémon e uma linha por Pokémon: número da Pokédex, nome, tipo e coordenada.</a:t>
+            </a:r>
+          </a:p>
+        </p:txBody>
+      </p:sp>
+      <p:sp>
+        <p:nvSpPr>
+          <p:cNvPr id="8" name="TextBox 7"/>
+          <p:cNvSpPr txBox="1"/>
+          <p:nvPr/>
+        </p:nvSpPr>
+        <p:spPr>
+          <a:xfrm>
+            <a:off x="932688" y="5852160"/>
+            <a:ext cx="1097280" cy="219456"/>
+          </a:xfrm>
+          <a:prstGeom prst="rect">
+            <a:avLst/>
+          </a:prstGeom>
+          <a:noFill/>
+        </p:spPr>
+        <p:txBody>
+          <a:bodyPr wrap="square" lIns="0" rIns="0" tIns="0" bIns="0">
+            <a:spAutoFit/>
+          </a:bodyPr>
+          <a:lstStyle/>
+          <a:p>
+            <a:pPr algn="l" marL="0" indent="0">
+              <a:lnSpc>
+                <a:spcPct val="90000"/>
+              </a:lnSpc>
+              <a:spcBef>
+                <a:spcPts val="0"/>
+              </a:spcBef>
+              <a:buNone/>
+            </a:pPr>
+            <a:r>
+              <a:rPr sz="1100" b="0">
+                <a:solidFill>
+                  <a:srgbClr val="6E6C66"/>
+                </a:solidFill>
+                <a:latin typeface="Lato"/>
+              </a:rPr>
+              <a:t>8</a:t>
             </a:r>
           </a:p>
         </p:txBody>
@@ -10319,7 +10754,7 @@
         <p:spPr>
           <a:xfrm>
             <a:off x="932688" y="1115568"/>
-            <a:ext cx="4841748" cy="2861032"/>
+            <a:ext cx="4841748" cy="2993831"/>
           </a:xfrm>
           <a:prstGeom prst="rect">
             <a:avLst/>
@@ -10342,8 +10777,8 @@
         </p:blipFill>
         <p:spPr>
           <a:xfrm>
-            <a:off x="7155616" y="1115568"/>
-            <a:ext cx="3359546" cy="2861032"/>
+            <a:off x="7122899" y="1115568"/>
+            <a:ext cx="3424981" cy="2993831"/>
           </a:xfrm>
           <a:prstGeom prst="rect">
             <a:avLst/>
@@ -10358,7 +10793,7 @@
         </p:nvSpPr>
         <p:spPr>
           <a:xfrm>
-            <a:off x="932688" y="4086328"/>
+            <a:off x="932688" y="4219127"/>
             <a:ext cx="4841748" cy="256032"/>
           </a:xfrm>
           <a:prstGeom prst="rect">
@@ -10401,7 +10836,7 @@
         </p:nvSpPr>
         <p:spPr>
           <a:xfrm>
-            <a:off x="6414516" y="4086328"/>
+            <a:off x="6414516" y="4219127"/>
             <a:ext cx="4841748" cy="256032"/>
           </a:xfrm>
           <a:prstGeom prst="rect">
@@ -10444,8 +10879,8 @@
         </p:nvSpPr>
         <p:spPr>
           <a:xfrm>
-            <a:off x="932688" y="4433800"/>
-            <a:ext cx="10323576" cy="1272055"/>
+            <a:off x="932688" y="4566599"/>
+            <a:ext cx="10323576" cy="1139256"/>
           </a:xfrm>
           <a:prstGeom prst="rect">
             <a:avLst/>
@@ -10475,6 +10910,49 @@
                 <a:latin typeface="Lato"/>
               </a:rPr>
               <a:t>A quantidade da recarga é sorteada entre 1 e 20. O relatório sai na ordem em que os Pokémon foram entregues, porque a lista insere no fim e a entrega retira do começo.</a:t>
+            </a:r>
+          </a:p>
+        </p:txBody>
+      </p:sp>
+      <p:sp>
+        <p:nvSpPr>
+          <p:cNvPr id="8" name="TextBox 7"/>
+          <p:cNvSpPr txBox="1"/>
+          <p:nvPr/>
+        </p:nvSpPr>
+        <p:spPr>
+          <a:xfrm>
+            <a:off x="932688" y="5852160"/>
+            <a:ext cx="1097280" cy="219456"/>
+          </a:xfrm>
+          <a:prstGeom prst="rect">
+            <a:avLst/>
+          </a:prstGeom>
+          <a:noFill/>
+        </p:spPr>
+        <p:txBody>
+          <a:bodyPr wrap="square" lIns="0" rIns="0" tIns="0" bIns="0">
+            <a:spAutoFit/>
+          </a:bodyPr>
+          <a:lstStyle/>
+          <a:p>
+            <a:pPr algn="l" marL="0" indent="0">
+              <a:lnSpc>
+                <a:spcPct val="90000"/>
+              </a:lnSpc>
+              <a:spcBef>
+                <a:spcPts val="0"/>
+              </a:spcBef>
+              <a:buNone/>
+            </a:pPr>
+            <a:r>
+              <a:rPr sz="1100" b="0">
+                <a:solidFill>
+                  <a:srgbClr val="6E6C66"/>
+                </a:solidFill>
+                <a:latin typeface="Lato"/>
+              </a:rPr>
+              <a:t>9</a:t>
             </a:r>
           </a:p>
         </p:txBody>

--- a/apresentacao/slides.pptx
+++ b/apresentacao/slides.pptx
@@ -8349,12 +8349,12 @@
           </a:p>
           <a:p>
             <a:r>
-              <a:t>&lt;Aluno 1&gt; – &lt;matrícula&gt;</a:t>
+              <a:t>Gabriel Henrique R. Macedo – 07237</a:t>
             </a:r>
           </a:p>
           <a:p>
             <a:r>
-              <a:t>&lt;Aluno 2&gt; – &lt;matrícula&gt;</a:t>
+              <a:t>Diego Soares Carvalho – 07225</a:t>
             </a:r>
           </a:p>
         </p:txBody>
@@ -9211,7 +9211,7 @@
               <a:buChar char="•"/>
             </a:pPr>
             <a:r>
-              <a:rPr sz="2400" b="0">
+              <a:rPr sz="2200" b="0">
                 <a:solidFill>
                   <a:srgbClr val="222320"/>
                 </a:solidFill>
@@ -9231,7 +9231,7 @@
               <a:buNone/>
             </a:pPr>
             <a:r>
-              <a:rPr sz="2400" b="1">
+              <a:rPr sz="2200" b="1">
                 <a:solidFill>
                   <a:srgbClr val="222320"/>
                 </a:solidFill>
@@ -9252,7 +9252,7 @@
               <a:buChar char="•"/>
             </a:pPr>
             <a:r>
-              <a:rPr sz="2400" b="0">
+              <a:rPr sz="2200" b="0">
                 <a:solidFill>
                   <a:srgbClr val="222320"/>
                 </a:solidFill>
@@ -9273,7 +9273,7 @@
               <a:buChar char="•"/>
             </a:pPr>
             <a:r>
-              <a:rPr sz="2400" b="0">
+              <a:rPr sz="2200" b="0">
                 <a:solidFill>
                   <a:srgbClr val="222320"/>
                 </a:solidFill>
@@ -9294,7 +9294,7 @@
               <a:buChar char="•"/>
             </a:pPr>
             <a:r>
-              <a:rPr sz="2400" b="0">
+              <a:rPr sz="2200" b="0">
                 <a:solidFill>
                   <a:srgbClr val="222320"/>
                 </a:solidFill>
@@ -9315,13 +9315,13 @@
               <a:buChar char="•"/>
             </a:pPr>
             <a:r>
-              <a:rPr sz="2400" b="0">
+              <a:rPr sz="2200" b="0">
                 <a:solidFill>
                   <a:srgbClr val="222320"/>
                 </a:solidFill>
                 <a:latin typeface="Lato"/>
               </a:rPr>
-              <a:t>&lt;Aluno 1&gt; ficou com &lt;...&gt; e &lt;Aluno 2&gt; com &lt;...&gt;.</a:t>
+              <a:t>Escrevemos o código juntos, um digitando e o outro revisando, alternando a cada módulo — foi o que manteve os dois sabendo explicar o projeto inteiro.</a:t>
             </a:r>
           </a:p>
         </p:txBody>
